--- a/skills/uav-paper-report/assets/examples/uav-paper-report-v60.pptx
+++ b/skills/uav-paper-report/assets/examples/uav-paper-report-v60.pptx
@@ -3100,7 +3100,7 @@
 </file>
 
 <file path=ppt/slides/slide1.xml><?xml version="1.0" encoding="utf-8"?>
-<p:sld xmlns:a="http://schemas.openxmlformats.org/drawingml/2006/main" xmlns:p="http://schemas.openxmlformats.org/presentationml/2006/main" xmlns:r="http://schemas.openxmlformats.org/officeDocument/2006/relationships">
+<p:sld xmlns:a="http://schemas.openxmlformats.org/drawingml/2006/main" xmlns:ns2="http://schemas.openxmlformats.org/officeDocument/2006/relationships" xmlns:p="http://schemas.openxmlformats.org/presentationml/2006/main">
   <p:cSld>
     <p:spTree>
       <p:nvGrpSpPr>
@@ -3118,7 +3118,7 @@
           <p:nvPr/>
         </p:nvPicPr>
         <p:blipFill>
-          <a:blip r:embed="rId2"/>
+          <a:blip ns2:embed="rId2"/>
           <a:stretch>
             <a:fillRect/>
           </a:stretch>
@@ -3168,13 +3168,6 @@
             <a:schemeClr val="lt1"/>
           </a:fontRef>
         </p:style>
-        <p:txBody>
-          <a:bodyPr rtlCol="0" anchor="ctr"/>
-          <a:lstStyle/>
-          <a:p>
-            <a:pPr algn="ctr"/>
-          </a:p>
-        </p:txBody>
       </p:sp>
       <p:sp>
         <p:nvSpPr>
@@ -3324,7 +3317,7 @@
 </file>
 
 <file path=ppt/slides/slide10.xml><?xml version="1.0" encoding="utf-8"?>
-<p:sld xmlns:a="http://schemas.openxmlformats.org/drawingml/2006/main" xmlns:p="http://schemas.openxmlformats.org/presentationml/2006/main" xmlns:r="http://schemas.openxmlformats.org/officeDocument/2006/relationships">
+<p:sld xmlns:a="http://schemas.openxmlformats.org/drawingml/2006/main" xmlns:ns2="http://schemas.openxmlformats.org/officeDocument/2006/relationships" xmlns:p="http://schemas.openxmlformats.org/presentationml/2006/main">
   <p:cSld>
     <p:spTree>
       <p:nvGrpSpPr>
@@ -3368,13 +3361,6 @@
             <a:schemeClr val="lt1"/>
           </a:fontRef>
         </p:style>
-        <p:txBody>
-          <a:bodyPr rtlCol="0" anchor="ctr"/>
-          <a:lstStyle/>
-          <a:p>
-            <a:pPr algn="ctr"/>
-          </a:p>
-        </p:txBody>
       </p:sp>
       <p:pic>
         <p:nvPicPr>
@@ -3385,7 +3371,7 @@
           <p:nvPr/>
         </p:nvPicPr>
         <p:blipFill>
-          <a:blip r:embed="rId2"/>
+          <a:blip ns2:embed="rId2"/>
           <a:stretch>
             <a:fillRect/>
           </a:stretch>
@@ -3802,13 +3788,6 @@
             <a:schemeClr val="lt1"/>
           </a:fontRef>
         </p:style>
-        <p:txBody>
-          <a:bodyPr rtlCol="0" anchor="ctr"/>
-          <a:lstStyle/>
-          <a:p>
-            <a:pPr algn="ctr"/>
-          </a:p>
-        </p:txBody>
       </p:sp>
       <p:sp>
         <p:nvSpPr>
@@ -4004,7 +3983,7 @@
 </file>
 
 <file path=ppt/slides/slide11.xml><?xml version="1.0" encoding="utf-8"?>
-<p:sld xmlns:a="http://schemas.openxmlformats.org/drawingml/2006/main" xmlns:p="http://schemas.openxmlformats.org/presentationml/2006/main" xmlns:r="http://schemas.openxmlformats.org/officeDocument/2006/relationships">
+<p:sld xmlns:a="http://schemas.openxmlformats.org/drawingml/2006/main" xmlns:ns2="http://schemas.openxmlformats.org/officeDocument/2006/relationships" xmlns:p="http://schemas.openxmlformats.org/presentationml/2006/main">
   <p:cSld>
     <p:spTree>
       <p:nvGrpSpPr>
@@ -4048,13 +4027,6 @@
             <a:schemeClr val="lt1"/>
           </a:fontRef>
         </p:style>
-        <p:txBody>
-          <a:bodyPr rtlCol="0" anchor="ctr"/>
-          <a:lstStyle/>
-          <a:p>
-            <a:pPr algn="ctr"/>
-          </a:p>
-        </p:txBody>
       </p:sp>
       <p:pic>
         <p:nvPicPr>
@@ -4065,7 +4037,7 @@
           <p:nvPr/>
         </p:nvPicPr>
         <p:blipFill>
-          <a:blip r:embed="rId2"/>
+          <a:blip ns2:embed="rId2"/>
           <a:stretch>
             <a:fillRect/>
           </a:stretch>
@@ -4425,13 +4397,6 @@
             <a:schemeClr val="lt1"/>
           </a:fontRef>
         </p:style>
-        <p:txBody>
-          <a:bodyPr rtlCol="0" anchor="ctr"/>
-          <a:lstStyle/>
-          <a:p>
-            <a:pPr algn="ctr"/>
-          </a:p>
-        </p:txBody>
       </p:sp>
       <p:sp>
         <p:nvSpPr>
@@ -4605,7 +4570,7 @@
 </file>
 
 <file path=ppt/slides/slide12.xml><?xml version="1.0" encoding="utf-8"?>
-<p:sld xmlns:a="http://schemas.openxmlformats.org/drawingml/2006/main" xmlns:p="http://schemas.openxmlformats.org/presentationml/2006/main" xmlns:r="http://schemas.openxmlformats.org/officeDocument/2006/relationships">
+<p:sld xmlns:a="http://schemas.openxmlformats.org/drawingml/2006/main" xmlns:ns2="http://schemas.openxmlformats.org/officeDocument/2006/relationships" xmlns:p="http://schemas.openxmlformats.org/presentationml/2006/main">
   <p:cSld>
     <p:spTree>
       <p:nvGrpSpPr>
@@ -4649,13 +4614,6 @@
             <a:schemeClr val="lt1"/>
           </a:fontRef>
         </p:style>
-        <p:txBody>
-          <a:bodyPr rtlCol="0" anchor="ctr"/>
-          <a:lstStyle/>
-          <a:p>
-            <a:pPr algn="ctr"/>
-          </a:p>
-        </p:txBody>
       </p:sp>
       <p:pic>
         <p:nvPicPr>
@@ -4666,7 +4624,7 @@
           <p:nvPr/>
         </p:nvPicPr>
         <p:blipFill>
-          <a:blip r:embed="rId2"/>
+          <a:blip ns2:embed="rId2"/>
           <a:stretch>
             <a:fillRect/>
           </a:stretch>
@@ -5061,13 +5019,6 @@
             <a:schemeClr val="lt1"/>
           </a:fontRef>
         </p:style>
-        <p:txBody>
-          <a:bodyPr rtlCol="0" anchor="ctr"/>
-          <a:lstStyle/>
-          <a:p>
-            <a:pPr algn="ctr"/>
-          </a:p>
-        </p:txBody>
       </p:sp>
       <p:sp>
         <p:nvSpPr>
@@ -5241,7 +5192,7 @@
 </file>
 
 <file path=ppt/slides/slide13.xml><?xml version="1.0" encoding="utf-8"?>
-<p:sld xmlns:a="http://schemas.openxmlformats.org/drawingml/2006/main" xmlns:p="http://schemas.openxmlformats.org/presentationml/2006/main" xmlns:r="http://schemas.openxmlformats.org/officeDocument/2006/relationships">
+<p:sld xmlns:a="http://schemas.openxmlformats.org/drawingml/2006/main" xmlns:ns2="http://schemas.openxmlformats.org/officeDocument/2006/relationships" xmlns:p="http://schemas.openxmlformats.org/presentationml/2006/main">
   <p:cSld>
     <p:spTree>
       <p:nvGrpSpPr>
@@ -5285,13 +5236,6 @@
             <a:schemeClr val="lt1"/>
           </a:fontRef>
         </p:style>
-        <p:txBody>
-          <a:bodyPr rtlCol="0" anchor="ctr"/>
-          <a:lstStyle/>
-          <a:p>
-            <a:pPr algn="ctr"/>
-          </a:p>
-        </p:txBody>
       </p:sp>
       <p:pic>
         <p:nvPicPr>
@@ -5302,7 +5246,7 @@
           <p:nvPr/>
         </p:nvPicPr>
         <p:blipFill>
-          <a:blip r:embed="rId2"/>
+          <a:blip ns2:embed="rId2"/>
           <a:stretch>
             <a:fillRect/>
           </a:stretch>
@@ -5662,13 +5606,6 @@
             <a:schemeClr val="lt1"/>
           </a:fontRef>
         </p:style>
-        <p:txBody>
-          <a:bodyPr rtlCol="0" anchor="ctr"/>
-          <a:lstStyle/>
-          <a:p>
-            <a:pPr algn="ctr"/>
-          </a:p>
-        </p:txBody>
       </p:sp>
       <p:sp>
         <p:nvSpPr>
@@ -5820,7 +5757,7 @@
 </file>
 
 <file path=ppt/slides/slide14.xml><?xml version="1.0" encoding="utf-8"?>
-<p:sld xmlns:a="http://schemas.openxmlformats.org/drawingml/2006/main" xmlns:p="http://schemas.openxmlformats.org/presentationml/2006/main" xmlns:r="http://schemas.openxmlformats.org/officeDocument/2006/relationships">
+<p:sld xmlns:a="http://schemas.openxmlformats.org/drawingml/2006/main" xmlns:ns2="http://schemas.openxmlformats.org/officeDocument/2006/relationships" xmlns:p="http://schemas.openxmlformats.org/presentationml/2006/main">
   <p:cSld>
     <p:spTree>
       <p:nvGrpSpPr>
@@ -5864,13 +5801,6 @@
             <a:schemeClr val="lt1"/>
           </a:fontRef>
         </p:style>
-        <p:txBody>
-          <a:bodyPr rtlCol="0" anchor="ctr"/>
-          <a:lstStyle/>
-          <a:p>
-            <a:pPr algn="ctr"/>
-          </a:p>
-        </p:txBody>
       </p:sp>
       <p:pic>
         <p:nvPicPr>
@@ -5881,7 +5811,7 @@
           <p:nvPr/>
         </p:nvPicPr>
         <p:blipFill>
-          <a:blip r:embed="rId2"/>
+          <a:blip ns2:embed="rId2"/>
           <a:stretch>
             <a:fillRect/>
           </a:stretch>
@@ -6183,7 +6113,7 @@
           <p:nvPr/>
         </p:nvPicPr>
         <p:blipFill>
-          <a:blip r:embed="rId3"/>
+          <a:blip ns2:embed="rId3"/>
           <a:stretch>
             <a:fillRect/>
           </a:stretch>
@@ -6233,13 +6163,6 @@
             <a:schemeClr val="lt1"/>
           </a:fontRef>
         </p:style>
-        <p:txBody>
-          <a:bodyPr rtlCol="0" anchor="ctr"/>
-          <a:lstStyle/>
-          <a:p>
-            <a:pPr algn="ctr"/>
-          </a:p>
-        </p:txBody>
       </p:sp>
       <p:sp>
         <p:nvSpPr>
@@ -6321,7 +6244,7 @@
 </file>
 
 <file path=ppt/slides/slide15.xml><?xml version="1.0" encoding="utf-8"?>
-<p:sld xmlns:a="http://schemas.openxmlformats.org/drawingml/2006/main" xmlns:p="http://schemas.openxmlformats.org/presentationml/2006/main" xmlns:r="http://schemas.openxmlformats.org/officeDocument/2006/relationships">
+<p:sld xmlns:a="http://schemas.openxmlformats.org/drawingml/2006/main" xmlns:ns2="http://schemas.openxmlformats.org/officeDocument/2006/relationships" xmlns:p="http://schemas.openxmlformats.org/presentationml/2006/main">
   <p:cSld>
     <p:spTree>
       <p:nvGrpSpPr>
@@ -6365,13 +6288,6 @@
             <a:schemeClr val="lt1"/>
           </a:fontRef>
         </p:style>
-        <p:txBody>
-          <a:bodyPr rtlCol="0" anchor="ctr"/>
-          <a:lstStyle/>
-          <a:p>
-            <a:pPr algn="ctr"/>
-          </a:p>
-        </p:txBody>
       </p:sp>
       <p:pic>
         <p:nvPicPr>
@@ -6382,7 +6298,7 @@
           <p:nvPr/>
         </p:nvPicPr>
         <p:blipFill>
-          <a:blip r:embed="rId2"/>
+          <a:blip ns2:embed="rId2"/>
           <a:stretch>
             <a:fillRect/>
           </a:stretch>
@@ -7364,7 +7280,7 @@
 </file>
 
 <file path=ppt/slides/slide16.xml><?xml version="1.0" encoding="utf-8"?>
-<p:sld xmlns:a="http://schemas.openxmlformats.org/drawingml/2006/main" xmlns:p="http://schemas.openxmlformats.org/presentationml/2006/main" xmlns:r="http://schemas.openxmlformats.org/officeDocument/2006/relationships">
+<p:sld xmlns:a="http://schemas.openxmlformats.org/drawingml/2006/main" xmlns:ns2="http://schemas.openxmlformats.org/officeDocument/2006/relationships" xmlns:p="http://schemas.openxmlformats.org/presentationml/2006/main">
   <p:cSld>
     <p:spTree>
       <p:nvGrpSpPr>
@@ -7408,13 +7324,6 @@
             <a:schemeClr val="lt1"/>
           </a:fontRef>
         </p:style>
-        <p:txBody>
-          <a:bodyPr rtlCol="0" anchor="ctr"/>
-          <a:lstStyle/>
-          <a:p>
-            <a:pPr algn="ctr"/>
-          </a:p>
-        </p:txBody>
       </p:sp>
       <p:pic>
         <p:nvPicPr>
@@ -7425,7 +7334,7 @@
           <p:nvPr/>
         </p:nvPicPr>
         <p:blipFill>
-          <a:blip r:embed="rId2"/>
+          <a:blip ns2:embed="rId2"/>
           <a:stretch>
             <a:fillRect/>
           </a:stretch>
@@ -7734,7 +7643,7 @@
           <p:nvPr/>
         </p:nvPicPr>
         <p:blipFill>
-          <a:blip r:embed="rId3"/>
+          <a:blip ns2:embed="rId3"/>
           <a:stretch>
             <a:fillRect/>
           </a:stretch>
@@ -7805,7 +7714,7 @@
 </file>
 
 <file path=ppt/slides/slide17.xml><?xml version="1.0" encoding="utf-8"?>
-<p:sld xmlns:a="http://schemas.openxmlformats.org/drawingml/2006/main" xmlns:p="http://schemas.openxmlformats.org/presentationml/2006/main" xmlns:r="http://schemas.openxmlformats.org/officeDocument/2006/relationships">
+<p:sld xmlns:a="http://schemas.openxmlformats.org/drawingml/2006/main" xmlns:ns2="http://schemas.openxmlformats.org/officeDocument/2006/relationships" xmlns:p="http://schemas.openxmlformats.org/presentationml/2006/main">
   <p:cSld>
     <p:spTree>
       <p:nvGrpSpPr>
@@ -7849,13 +7758,6 @@
             <a:schemeClr val="lt1"/>
           </a:fontRef>
         </p:style>
-        <p:txBody>
-          <a:bodyPr rtlCol="0" anchor="ctr"/>
-          <a:lstStyle/>
-          <a:p>
-            <a:pPr algn="ctr"/>
-          </a:p>
-        </p:txBody>
       </p:sp>
       <p:pic>
         <p:nvPicPr>
@@ -7866,7 +7768,7 @@
           <p:nvPr/>
         </p:nvPicPr>
         <p:blipFill>
-          <a:blip r:embed="rId2"/>
+          <a:blip ns2:embed="rId2"/>
           <a:stretch>
             <a:fillRect/>
           </a:stretch>
@@ -9133,7 +9035,7 @@
 </file>
 
 <file path=ppt/slides/slide18.xml><?xml version="1.0" encoding="utf-8"?>
-<p:sld xmlns:a="http://schemas.openxmlformats.org/drawingml/2006/main" xmlns:p="http://schemas.openxmlformats.org/presentationml/2006/main" xmlns:r="http://schemas.openxmlformats.org/officeDocument/2006/relationships">
+<p:sld xmlns:a="http://schemas.openxmlformats.org/drawingml/2006/main" xmlns:ns2="http://schemas.openxmlformats.org/officeDocument/2006/relationships" xmlns:p="http://schemas.openxmlformats.org/presentationml/2006/main">
   <p:cSld>
     <p:spTree>
       <p:nvGrpSpPr>
@@ -9177,13 +9079,6 @@
             <a:schemeClr val="lt1"/>
           </a:fontRef>
         </p:style>
-        <p:txBody>
-          <a:bodyPr rtlCol="0" anchor="ctr"/>
-          <a:lstStyle/>
-          <a:p>
-            <a:pPr algn="ctr"/>
-          </a:p>
-        </p:txBody>
       </p:sp>
       <p:pic>
         <p:nvPicPr>
@@ -9194,7 +9089,7 @@
           <p:nvPr/>
         </p:nvPicPr>
         <p:blipFill>
-          <a:blip r:embed="rId2"/>
+          <a:blip ns2:embed="rId2"/>
           <a:stretch>
             <a:fillRect/>
           </a:stretch>
@@ -10219,7 +10114,7 @@
 </file>
 
 <file path=ppt/slides/slide19.xml><?xml version="1.0" encoding="utf-8"?>
-<p:sld xmlns:a="http://schemas.openxmlformats.org/drawingml/2006/main" xmlns:p="http://schemas.openxmlformats.org/presentationml/2006/main" xmlns:r="http://schemas.openxmlformats.org/officeDocument/2006/relationships">
+<p:sld xmlns:a="http://schemas.openxmlformats.org/drawingml/2006/main" xmlns:ns2="http://schemas.openxmlformats.org/officeDocument/2006/relationships" xmlns:p="http://schemas.openxmlformats.org/presentationml/2006/main">
   <p:cSld>
     <p:spTree>
       <p:nvGrpSpPr>
@@ -10263,13 +10158,6 @@
             <a:schemeClr val="lt1"/>
           </a:fontRef>
         </p:style>
-        <p:txBody>
-          <a:bodyPr rtlCol="0" anchor="ctr"/>
-          <a:lstStyle/>
-          <a:p>
-            <a:pPr algn="ctr"/>
-          </a:p>
-        </p:txBody>
       </p:sp>
       <p:pic>
         <p:nvPicPr>
@@ -10280,7 +10168,7 @@
           <p:nvPr/>
         </p:nvPicPr>
         <p:blipFill>
-          <a:blip r:embed="rId2"/>
+          <a:blip ns2:embed="rId2"/>
           <a:stretch>
             <a:fillRect/>
           </a:stretch>
@@ -10545,7 +10433,7 @@
           <p:nvPr/>
         </p:nvPicPr>
         <p:blipFill>
-          <a:blip r:embed="rId3"/>
+          <a:blip ns2:embed="rId3"/>
           <a:stretch>
             <a:fillRect/>
           </a:stretch>
@@ -10616,7 +10504,7 @@
 </file>
 
 <file path=ppt/slides/slide2.xml><?xml version="1.0" encoding="utf-8"?>
-<p:sld xmlns:a="http://schemas.openxmlformats.org/drawingml/2006/main" xmlns:p="http://schemas.openxmlformats.org/presentationml/2006/main" xmlns:r="http://schemas.openxmlformats.org/officeDocument/2006/relationships">
+<p:sld xmlns:a="http://schemas.openxmlformats.org/drawingml/2006/main" xmlns:ns2="http://schemas.openxmlformats.org/officeDocument/2006/relationships" xmlns:p="http://schemas.openxmlformats.org/presentationml/2006/main">
   <p:cSld>
     <p:spTree>
       <p:nvGrpSpPr>
@@ -10660,13 +10548,6 @@
             <a:schemeClr val="lt1"/>
           </a:fontRef>
         </p:style>
-        <p:txBody>
-          <a:bodyPr rtlCol="0" anchor="ctr"/>
-          <a:lstStyle/>
-          <a:p>
-            <a:pPr algn="ctr"/>
-          </a:p>
-        </p:txBody>
       </p:sp>
       <p:pic>
         <p:nvPicPr>
@@ -10677,7 +10558,7 @@
           <p:nvPr/>
         </p:nvPicPr>
         <p:blipFill>
-          <a:blip r:embed="rId2"/>
+          <a:blip ns2:embed="rId2"/>
           <a:stretch>
             <a:fillRect/>
           </a:stretch>
@@ -11014,7 +10895,7 @@
 </file>
 
 <file path=ppt/slides/slide20.xml><?xml version="1.0" encoding="utf-8"?>
-<p:sld xmlns:a="http://schemas.openxmlformats.org/drawingml/2006/main" xmlns:p="http://schemas.openxmlformats.org/presentationml/2006/main" xmlns:r="http://schemas.openxmlformats.org/officeDocument/2006/relationships">
+<p:sld xmlns:a="http://schemas.openxmlformats.org/drawingml/2006/main" xmlns:ns2="http://schemas.openxmlformats.org/officeDocument/2006/relationships" xmlns:p="http://schemas.openxmlformats.org/presentationml/2006/main">
   <p:cSld>
     <p:spTree>
       <p:nvGrpSpPr>
@@ -11058,13 +10939,6 @@
             <a:schemeClr val="lt1"/>
           </a:fontRef>
         </p:style>
-        <p:txBody>
-          <a:bodyPr rtlCol="0" anchor="ctr"/>
-          <a:lstStyle/>
-          <a:p>
-            <a:pPr algn="ctr"/>
-          </a:p>
-        </p:txBody>
       </p:sp>
       <p:pic>
         <p:nvPicPr>
@@ -11075,7 +10949,7 @@
           <p:nvPr/>
         </p:nvPicPr>
         <p:blipFill>
-          <a:blip r:embed="rId2"/>
+          <a:blip ns2:embed="rId2"/>
           <a:stretch>
             <a:fillRect/>
           </a:stretch>
@@ -11458,7 +11332,7 @@
 </file>
 
 <file path=ppt/slides/slide21.xml><?xml version="1.0" encoding="utf-8"?>
-<p:sld xmlns:a="http://schemas.openxmlformats.org/drawingml/2006/main" xmlns:p="http://schemas.openxmlformats.org/presentationml/2006/main" xmlns:r="http://schemas.openxmlformats.org/officeDocument/2006/relationships">
+<p:sld xmlns:a="http://schemas.openxmlformats.org/drawingml/2006/main" xmlns:ns2="http://schemas.openxmlformats.org/officeDocument/2006/relationships" xmlns:p="http://schemas.openxmlformats.org/presentationml/2006/main">
   <p:cSld>
     <p:spTree>
       <p:nvGrpSpPr>
@@ -11502,13 +11376,6 @@
             <a:schemeClr val="lt1"/>
           </a:fontRef>
         </p:style>
-        <p:txBody>
-          <a:bodyPr rtlCol="0" anchor="ctr"/>
-          <a:lstStyle/>
-          <a:p>
-            <a:pPr algn="ctr"/>
-          </a:p>
-        </p:txBody>
       </p:sp>
       <p:pic>
         <p:nvPicPr>
@@ -11519,7 +11386,7 @@
           <p:nvPr/>
         </p:nvPicPr>
         <p:blipFill>
-          <a:blip r:embed="rId2"/>
+          <a:blip ns2:embed="rId2"/>
           <a:stretch>
             <a:fillRect/>
           </a:stretch>
@@ -11856,7 +11723,7 @@
 </file>
 
 <file path=ppt/slides/slide22.xml><?xml version="1.0" encoding="utf-8"?>
-<p:sld xmlns:a="http://schemas.openxmlformats.org/drawingml/2006/main" xmlns:p="http://schemas.openxmlformats.org/presentationml/2006/main" xmlns:r="http://schemas.openxmlformats.org/officeDocument/2006/relationships">
+<p:sld xmlns:a="http://schemas.openxmlformats.org/drawingml/2006/main" xmlns:p="http://schemas.openxmlformats.org/presentationml/2006/main">
   <p:cSld>
     <p:spTree>
       <p:nvGrpSpPr>
@@ -11900,13 +11767,6 @@
             <a:schemeClr val="lt1"/>
           </a:fontRef>
         </p:style>
-        <p:txBody>
-          <a:bodyPr rtlCol="0" anchor="ctr"/>
-          <a:lstStyle/>
-          <a:p>
-            <a:pPr algn="ctr"/>
-          </a:p>
-        </p:txBody>
       </p:sp>
       <p:sp>
         <p:nvSpPr>
@@ -11991,7 +11851,7 @@
 </file>
 
 <file path=ppt/slides/slide3.xml><?xml version="1.0" encoding="utf-8"?>
-<p:sld xmlns:a="http://schemas.openxmlformats.org/drawingml/2006/main" xmlns:p="http://schemas.openxmlformats.org/presentationml/2006/main" xmlns:r="http://schemas.openxmlformats.org/officeDocument/2006/relationships">
+<p:sld xmlns:a="http://schemas.openxmlformats.org/drawingml/2006/main" xmlns:ns2="http://schemas.openxmlformats.org/officeDocument/2006/relationships" xmlns:p="http://schemas.openxmlformats.org/presentationml/2006/main">
   <p:cSld>
     <p:spTree>
       <p:nvGrpSpPr>
@@ -12035,13 +11895,6 @@
             <a:schemeClr val="lt1"/>
           </a:fontRef>
         </p:style>
-        <p:txBody>
-          <a:bodyPr rtlCol="0" anchor="ctr"/>
-          <a:lstStyle/>
-          <a:p>
-            <a:pPr algn="ctr"/>
-          </a:p>
-        </p:txBody>
       </p:sp>
       <p:pic>
         <p:nvPicPr>
@@ -12052,7 +11905,7 @@
           <p:nvPr/>
         </p:nvPicPr>
         <p:blipFill>
-          <a:blip r:embed="rId2"/>
+          <a:blip ns2:embed="rId2"/>
           <a:stretch>
             <a:fillRect/>
           </a:stretch>
@@ -12411,7 +12264,7 @@
 </file>
 
 <file path=ppt/slides/slide4.xml><?xml version="1.0" encoding="utf-8"?>
-<p:sld xmlns:a="http://schemas.openxmlformats.org/drawingml/2006/main" xmlns:p="http://schemas.openxmlformats.org/presentationml/2006/main" xmlns:r="http://schemas.openxmlformats.org/officeDocument/2006/relationships">
+<p:sld xmlns:a="http://schemas.openxmlformats.org/drawingml/2006/main" xmlns:ns2="http://schemas.openxmlformats.org/officeDocument/2006/relationships" xmlns:p="http://schemas.openxmlformats.org/presentationml/2006/main">
   <p:cSld>
     <p:spTree>
       <p:nvGrpSpPr>
@@ -12455,13 +12308,6 @@
             <a:schemeClr val="lt1"/>
           </a:fontRef>
         </p:style>
-        <p:txBody>
-          <a:bodyPr rtlCol="0" anchor="ctr"/>
-          <a:lstStyle/>
-          <a:p>
-            <a:pPr algn="ctr"/>
-          </a:p>
-        </p:txBody>
       </p:sp>
       <p:pic>
         <p:nvPicPr>
@@ -12472,7 +12318,7 @@
           <p:nvPr/>
         </p:nvPicPr>
         <p:blipFill>
-          <a:blip r:embed="rId2"/>
+          <a:blip ns2:embed="rId2"/>
           <a:stretch>
             <a:fillRect/>
           </a:stretch>
@@ -12809,7 +12655,7 @@
 </file>
 
 <file path=ppt/slides/slide5.xml><?xml version="1.0" encoding="utf-8"?>
-<p:sld xmlns:a="http://schemas.openxmlformats.org/drawingml/2006/main" xmlns:p="http://schemas.openxmlformats.org/presentationml/2006/main" xmlns:r="http://schemas.openxmlformats.org/officeDocument/2006/relationships">
+<p:sld xmlns:a="http://schemas.openxmlformats.org/drawingml/2006/main" xmlns:ns2="http://schemas.openxmlformats.org/officeDocument/2006/relationships" xmlns:p="http://schemas.openxmlformats.org/presentationml/2006/main">
   <p:cSld>
     <p:spTree>
       <p:nvGrpSpPr>
@@ -12853,13 +12699,6 @@
             <a:schemeClr val="lt1"/>
           </a:fontRef>
         </p:style>
-        <p:txBody>
-          <a:bodyPr rtlCol="0" anchor="ctr"/>
-          <a:lstStyle/>
-          <a:p>
-            <a:pPr algn="ctr"/>
-          </a:p>
-        </p:txBody>
       </p:sp>
       <p:pic>
         <p:nvPicPr>
@@ -12870,7 +12709,7 @@
           <p:nvPr/>
         </p:nvPicPr>
         <p:blipFill>
-          <a:blip r:embed="rId2"/>
+          <a:blip ns2:embed="rId2"/>
           <a:stretch>
             <a:fillRect/>
           </a:stretch>
@@ -13207,7 +13046,7 @@
 </file>
 
 <file path=ppt/slides/slide6.xml><?xml version="1.0" encoding="utf-8"?>
-<p:sld xmlns:a="http://schemas.openxmlformats.org/drawingml/2006/main" xmlns:p="http://schemas.openxmlformats.org/presentationml/2006/main" xmlns:r="http://schemas.openxmlformats.org/officeDocument/2006/relationships">
+<p:sld xmlns:a="http://schemas.openxmlformats.org/drawingml/2006/main" xmlns:ns2="http://schemas.openxmlformats.org/officeDocument/2006/relationships" xmlns:p="http://schemas.openxmlformats.org/presentationml/2006/main">
   <p:cSld>
     <p:spTree>
       <p:nvGrpSpPr>
@@ -13251,13 +13090,6 @@
             <a:schemeClr val="lt1"/>
           </a:fontRef>
         </p:style>
-        <p:txBody>
-          <a:bodyPr rtlCol="0" anchor="ctr"/>
-          <a:lstStyle/>
-          <a:p>
-            <a:pPr algn="ctr"/>
-          </a:p>
-        </p:txBody>
       </p:sp>
       <p:pic>
         <p:nvPicPr>
@@ -13268,7 +13100,7 @@
           <p:nvPr/>
         </p:nvPicPr>
         <p:blipFill>
-          <a:blip r:embed="rId2"/>
+          <a:blip ns2:embed="rId2"/>
           <a:stretch>
             <a:fillRect/>
           </a:stretch>
@@ -13673,7 +13505,7 @@
 </file>
 
 <file path=ppt/slides/slide7.xml><?xml version="1.0" encoding="utf-8"?>
-<p:sld xmlns:a="http://schemas.openxmlformats.org/drawingml/2006/main" xmlns:p="http://schemas.openxmlformats.org/presentationml/2006/main" xmlns:r="http://schemas.openxmlformats.org/officeDocument/2006/relationships">
+<p:sld xmlns:a="http://schemas.openxmlformats.org/drawingml/2006/main" xmlns:ns2="http://schemas.openxmlformats.org/officeDocument/2006/relationships" xmlns:p="http://schemas.openxmlformats.org/presentationml/2006/main">
   <p:cSld>
     <p:spTree>
       <p:nvGrpSpPr>
@@ -13717,13 +13549,6 @@
             <a:schemeClr val="lt1"/>
           </a:fontRef>
         </p:style>
-        <p:txBody>
-          <a:bodyPr rtlCol="0" anchor="ctr"/>
-          <a:lstStyle/>
-          <a:p>
-            <a:pPr algn="ctr"/>
-          </a:p>
-        </p:txBody>
       </p:sp>
       <p:pic>
         <p:nvPicPr>
@@ -13734,7 +13559,7 @@
           <p:nvPr/>
         </p:nvPicPr>
         <p:blipFill>
-          <a:blip r:embed="rId2"/>
+          <a:blip ns2:embed="rId2"/>
           <a:stretch>
             <a:fillRect/>
           </a:stretch>
@@ -13903,7 +13728,7 @@
           <p:nvPr/>
         </p:nvPicPr>
         <p:blipFill>
-          <a:blip r:embed="rId3"/>
+          <a:blip ns2:embed="rId3"/>
           <a:stretch>
             <a:fillRect/>
           </a:stretch>
@@ -14046,13 +13871,6 @@
             <a:schemeClr val="lt1"/>
           </a:fontRef>
         </p:style>
-        <p:txBody>
-          <a:bodyPr rtlCol="0" anchor="ctr"/>
-          <a:lstStyle/>
-          <a:p>
-            <a:pPr algn="ctr"/>
-          </a:p>
-        </p:txBody>
       </p:sp>
       <p:sp>
         <p:nvSpPr>
@@ -14110,7 +13928,7 @@
 </file>
 
 <file path=ppt/slides/slide8.xml><?xml version="1.0" encoding="utf-8"?>
-<p:sld xmlns:a="http://schemas.openxmlformats.org/drawingml/2006/main" xmlns:p="http://schemas.openxmlformats.org/presentationml/2006/main" xmlns:r="http://schemas.openxmlformats.org/officeDocument/2006/relationships">
+<p:sld xmlns:a="http://schemas.openxmlformats.org/drawingml/2006/main" xmlns:ns2="http://schemas.openxmlformats.org/officeDocument/2006/relationships" xmlns:p="http://schemas.openxmlformats.org/presentationml/2006/main">
   <p:cSld>
     <p:spTree>
       <p:nvGrpSpPr>
@@ -14154,13 +13972,6 @@
             <a:schemeClr val="lt1"/>
           </a:fontRef>
         </p:style>
-        <p:txBody>
-          <a:bodyPr rtlCol="0" anchor="ctr"/>
-          <a:lstStyle/>
-          <a:p>
-            <a:pPr algn="ctr"/>
-          </a:p>
-        </p:txBody>
       </p:sp>
       <p:pic>
         <p:nvPicPr>
@@ -14171,7 +13982,7 @@
           <p:nvPr/>
         </p:nvPicPr>
         <p:blipFill>
-          <a:blip r:embed="rId2"/>
+          <a:blip ns2:embed="rId2"/>
           <a:stretch>
             <a:fillRect/>
           </a:stretch>
@@ -14340,7 +14151,7 @@
           <p:nvPr/>
         </p:nvPicPr>
         <p:blipFill>
-          <a:blip r:embed="rId3"/>
+          <a:blip ns2:embed="rId3"/>
           <a:stretch>
             <a:fillRect/>
           </a:stretch>
@@ -14364,7 +14175,7 @@
           <p:nvPr/>
         </p:nvPicPr>
         <p:blipFill>
-          <a:blip r:embed="rId4"/>
+          <a:blip ns2:embed="rId4"/>
           <a:stretch>
             <a:fillRect/>
           </a:stretch>
@@ -14414,13 +14225,6 @@
             <a:schemeClr val="lt1"/>
           </a:fontRef>
         </p:style>
-        <p:txBody>
-          <a:bodyPr rtlCol="0" anchor="ctr"/>
-          <a:lstStyle/>
-          <a:p>
-            <a:pPr algn="ctr"/>
-          </a:p>
-        </p:txBody>
       </p:sp>
       <p:sp>
         <p:nvSpPr>
@@ -14550,7 +14354,7 @@
 </file>
 
 <file path=ppt/slides/slide9.xml><?xml version="1.0" encoding="utf-8"?>
-<p:sld xmlns:a="http://schemas.openxmlformats.org/drawingml/2006/main" xmlns:p="http://schemas.openxmlformats.org/presentationml/2006/main" xmlns:r="http://schemas.openxmlformats.org/officeDocument/2006/relationships">
+<p:sld xmlns:a="http://schemas.openxmlformats.org/drawingml/2006/main" xmlns:ns2="http://schemas.openxmlformats.org/officeDocument/2006/relationships" xmlns:p="http://schemas.openxmlformats.org/presentationml/2006/main">
   <p:cSld>
     <p:spTree>
       <p:nvGrpSpPr>
@@ -14594,13 +14398,6 @@
             <a:schemeClr val="lt1"/>
           </a:fontRef>
         </p:style>
-        <p:txBody>
-          <a:bodyPr rtlCol="0" anchor="ctr"/>
-          <a:lstStyle/>
-          <a:p>
-            <a:pPr algn="ctr"/>
-          </a:p>
-        </p:txBody>
       </p:sp>
       <p:pic>
         <p:nvPicPr>
@@ -14611,7 +14408,7 @@
           <p:nvPr/>
         </p:nvPicPr>
         <p:blipFill>
-          <a:blip r:embed="rId2"/>
+          <a:blip ns2:embed="rId2"/>
           <a:stretch>
             <a:fillRect/>
           </a:stretch>
@@ -15006,13 +14803,6 @@
             <a:schemeClr val="lt1"/>
           </a:fontRef>
         </p:style>
-        <p:txBody>
-          <a:bodyPr rtlCol="0" anchor="ctr"/>
-          <a:lstStyle/>
-          <a:p>
-            <a:pPr algn="ctr"/>
-          </a:p>
-        </p:txBody>
       </p:sp>
       <p:sp>
         <p:nvSpPr>
